--- a/others/final_presentation.pptx
+++ b/others/final_presentation.pptx
@@ -3132,7 +3132,7 @@
                   <a:srgbClr val="9FB2C8"/>
                 </a:solidFill>
               </a:rPr>
-              <a:t>Group 5  —  Shakil Ahmed  ·  Fahim Foysal  ·  Shefa Tabassum  ·  Tanvir Ahmed</a:t>
+              <a:t>Group 5  |  Shakil Ahmed  ·  Fahim Foysal  ·  Shefa Tabassum  ·  Tanvir Ahmed</a:t>
             </a:r>
           </a:p>
         </p:txBody>
@@ -3275,7 +3275,7 @@
                   <a:srgbClr val="9FB2C8"/>
                 </a:solidFill>
               </a:rPr>
-              <a:t>CSE 440 — Artificial Intelligence  ·  Section 1  ·  Instructor: Dr. Mohammad Shifat-E-Rabbi</a:t>
+              <a:t>CSE 440 (Artificial Intelligence)  ·  Section 1  ·  Instructor: Dr. Mohammad Shifat-E-Rabbi</a:t>
             </a:r>
           </a:p>
         </p:txBody>
@@ -3334,7 +3334,7 @@
                   <a:srgbClr val="606670"/>
                 </a:solidFill>
               </a:rPr>
-              <a:t>Group 5  —  Shakil Ahmed  ·  Fahim Foysal  ·  Shefa Tabassum  ·  Tanvir Ahmed</a:t>
+              <a:t>Group 5  |  Shakil Ahmed  ·  Fahim Foysal  ·  Shefa Tabassum  ·  Tanvir Ahmed</a:t>
             </a:r>
           </a:p>
         </p:txBody>
@@ -3455,7 +3455,7 @@
                   <a:srgbClr val="20242B"/>
                 </a:solidFill>
               </a:rPr>
-              <a:t>•  Movement is unreliable — the rover can slip sideways or stall</a:t>
+              <a:t>•  Movement is unreliable: the rover can slip sideways or stall</a:t>
             </a:r>
           </a:p>
           <a:p>
@@ -3553,7 +3553,7 @@
                   <a:srgbClr val="606670"/>
                 </a:solidFill>
               </a:rPr>
-              <a:t>Group 5  —  Shakil Ahmed  ·  Fahim Foysal  ·  Shefa Tabassum  ·  Tanvir Ahmed</a:t>
+              <a:t>Group 5  |  Shakil Ahmed  ·  Fahim Foysal  ·  Shefa Tabassum  ·  Tanvir Ahmed</a:t>
             </a:r>
           </a:p>
         </p:txBody>
@@ -3689,7 +3689,7 @@
                   <a:srgbClr val="20242B"/>
                 </a:solidFill>
               </a:rPr>
-              <a:t>•  Discount γ = 0.9 — tuned so distant science never justifies deadly gambles</a:t>
+              <a:t>•  Discount γ = 0.9, tuned so distant science never justifies deadly gambles</a:t>
             </a:r>
           </a:p>
           <a:p>
@@ -3816,7 +3816,7 @@
                   <a:srgbClr val="606670"/>
                 </a:solidFill>
               </a:rPr>
-              <a:t>Group 5  —  Shakil Ahmed  ·  Fahim Foysal  ·  Shefa Tabassum  ·  Tanvir Ahmed</a:t>
+              <a:t>Group 5  |  Shakil Ahmed  ·  Fahim Foysal  ·  Shefa Tabassum  ·  Tanvir Ahmed</a:t>
             </a:r>
           </a:p>
         </p:txBody>
@@ -3892,7 +3892,7 @@
                   <a:srgbClr val="20242B"/>
                 </a:solidFill>
               </a:rPr>
-              <a:t>•  One optimal action per cell — a complete plan, not a single path</a:t>
+              <a:t>•  One optimal action per cell: a complete plan, not a single path</a:t>
             </a:r>
           </a:p>
           <a:p>
@@ -4020,7 +4020,7 @@
                   <a:srgbClr val="606670"/>
                 </a:solidFill>
               </a:rPr>
-              <a:t>Group 5  —  Shakil Ahmed  ·  Fahim Foysal  ·  Shefa Tabassum  ·  Tanvir Ahmed</a:t>
+              <a:t>Group 5  |  Shakil Ahmed  ·  Fahim Foysal  ·  Shefa Tabassum  ·  Tanvir Ahmed</a:t>
             </a:r>
           </a:p>
         </p:txBody>
@@ -4111,7 +4111,7 @@
                   <a:srgbClr val="20242B"/>
                 </a:solidFill>
               </a:rPr>
-              <a:t>•  Our rule: a sample is collected once — the cell becomes ordinary ground</a:t>
+              <a:t>•  Our rule: a sample is collected once, then the cell becomes ordinary ground</a:t>
             </a:r>
           </a:p>
           <a:p>
@@ -4200,7 +4200,7 @@
                   <a:srgbClr val="606670"/>
                 </a:solidFill>
               </a:rPr>
-              <a:t>Group 5  —  Shakil Ahmed  ·  Fahim Foysal  ·  Shefa Tabassum  ·  Tanvir Ahmed</a:t>
+              <a:t>Group 5  |  Shakil Ahmed  ·  Fahim Foysal  ·  Shefa Tabassum  ·  Tanvir Ahmed</a:t>
             </a:r>
           </a:p>
         </p:txBody>
@@ -4306,7 +4306,7 @@
                   <a:srgbClr val="20242B"/>
                 </a:solidFill>
               </a:rPr>
-              <a:t>•  Base, science, rock, and craters are never destroyed — state space stays fixed</a:t>
+              <a:t>•  Base, science, rock, and craters are never destroyed, so the state space stays fixed</a:t>
             </a:r>
           </a:p>
           <a:p>
@@ -4481,7 +4481,7 @@
                   <a:srgbClr val="606670"/>
                 </a:solidFill>
               </a:rPr>
-              <a:t>Group 5  —  Shakil Ahmed  ·  Fahim Foysal  ·  Shefa Tabassum  ·  Tanvir Ahmed</a:t>
+              <a:t>Group 5  |  Shakil Ahmed  ·  Fahim Foysal  ·  Shefa Tabassum  ·  Tanvir Ahmed</a:t>
             </a:r>
           </a:p>
         </p:txBody>
@@ -4602,7 +4602,7 @@
                   <a:srgbClr val="20242B"/>
                 </a:solidFill>
               </a:rPr>
-              <a:t>•  Reward higher than the static run of the same seed — re-planning exploited a gas cloud drifting off its route</a:t>
+              <a:t>•  Reward higher than the static run of the same seed: re-planning exploited a gas cloud drifting off its route</a:t>
             </a:r>
           </a:p>
         </p:txBody>
@@ -4685,7 +4685,7 @@
                   <a:srgbClr val="606670"/>
                 </a:solidFill>
               </a:rPr>
-              <a:t>Group 5  —  Shakil Ahmed  ·  Fahim Foysal  ·  Shefa Tabassum  ·  Tanvir Ahmed</a:t>
+              <a:t>Group 5  |  Shakil Ahmed  ·  Fahim Foysal  ·  Shefa Tabassum  ·  Tanvir Ahmed</a:t>
             </a:r>
           </a:p>
         </p:txBody>
@@ -4776,7 +4776,7 @@
                   <a:srgbClr val="20242B"/>
                 </a:solidFill>
               </a:rPr>
-              <a:t>•  Greedy: BFS to nearest unvisited cell — ignores soft hazards</a:t>
+              <a:t>•  Greedy: BFS to nearest unvisited cell, ignoring soft hazards</a:t>
             </a:r>
           </a:p>
           <a:p>
@@ -4821,7 +4821,7 @@
                   <a:srgbClr val="20242B"/>
                 </a:solidFill>
               </a:rPr>
-              <a:t>•  It survives 60% of missions — 2× greedy — with ~5× fewer hazard entries</a:t>
+              <a:t>•  It survives 60% of missions (2× greedy) with ~5× fewer hazard entries</a:t>
             </a:r>
           </a:p>
         </p:txBody>
@@ -4904,7 +4904,7 @@
                   <a:srgbClr val="606670"/>
                 </a:solidFill>
               </a:rPr>
-              <a:t>Group 5  —  Shakil Ahmed  ·  Fahim Foysal  ·  Shefa Tabassum  ·  Tanvir Ahmed</a:t>
+              <a:t>Group 5  |  Shakil Ahmed  ·  Fahim Foysal  ·  Shefa Tabassum  ·  Tanvir Ahmed</a:t>
             </a:r>
           </a:p>
         </p:txBody>
@@ -4995,7 +4995,7 @@
                   <a:srgbClr val="20242B"/>
                 </a:solidFill>
               </a:rPr>
-              <a:t>•  Safety and science behavior emerge from the reward model — no hand-coded rules</a:t>
+              <a:t>•  Safety and science behavior emerge from the reward model, with no hand-coded rules</a:t>
             </a:r>
           </a:p>
           <a:p>

--- a/others/final_presentation.pptx
+++ b/others/final_presentation.pptx
@@ -20,23 +20,30 @@
   <p:notesSz cx="6858000" cy="9144000"/>
   <p:embeddedFontLst>
     <p:embeddedFont>
-      <p:font typeface="Cambria" panose="02040503050406030204" pitchFamily="18" charset="0"/>
+      <p:font typeface="Calibri" panose="020F0502020204030204" pitchFamily="34" charset="0"/>
       <p:regular r:id="rId12"/>
       <p:bold r:id="rId13"/>
       <p:italic r:id="rId14"/>
       <p:boldItalic r:id="rId15"/>
     </p:embeddedFont>
     <p:embeddedFont>
+      <p:font typeface="Cambria" panose="02040503050406030204" pitchFamily="18" charset="0"/>
+      <p:regular r:id="rId16"/>
+      <p:bold r:id="rId17"/>
+      <p:italic r:id="rId18"/>
+      <p:boldItalic r:id="rId19"/>
+    </p:embeddedFont>
+    <p:embeddedFont>
       <p:font typeface="Roca Two Bold" panose="020B0604020202020204" charset="0"/>
-      <p:regular r:id="rId16"/>
+      <p:regular r:id="rId20"/>
     </p:embeddedFont>
     <p:embeddedFont>
       <p:font typeface="Roca Two Heavy" panose="020B0604020202020204" charset="0"/>
-      <p:regular r:id="rId17"/>
+      <p:regular r:id="rId21"/>
     </p:embeddedFont>
     <p:embeddedFont>
       <p:font typeface="TT Chocolates Bold" panose="020B0604020202020204" charset="0"/>
-      <p:regular r:id="rId18"/>
+      <p:regular r:id="rId22"/>
     </p:embeddedFont>
   </p:embeddedFontLst>
   <p:defaultTextStyle>
@@ -3353,10 +3360,10 @@
             </a:pathLst>
           </a:custGeom>
           <a:blipFill>
-            <a:blip>
+            <a:blip r:embed="rId3">
               <a:extLst>
                 <a:ext uri="{96DAC541-7B7A-43D3-8B79-37D633B846F1}">
-                  <asvg:svgBlip xmlns:asvg="http://schemas.microsoft.com/office/drawing/2016/SVG/main" r:embed="rId3"/>
+                  <asvg:svgBlip xmlns:asvg="http://schemas.microsoft.com/office/drawing/2016/SVG/main" r:embed="rId4"/>
                 </a:ext>
               </a:extLst>
             </a:blip>
@@ -3616,10 +3623,10 @@
             </a:pathLst>
           </a:custGeom>
           <a:blipFill>
-            <a:blip>
+            <a:blip r:embed="rId5">
               <a:extLst>
                 <a:ext uri="{96DAC541-7B7A-43D3-8B79-37D633B846F1}">
-                  <asvg:svgBlip xmlns:asvg="http://schemas.microsoft.com/office/drawing/2016/SVG/main" r:embed="rId4"/>
+                  <asvg:svgBlip xmlns:asvg="http://schemas.microsoft.com/office/drawing/2016/SVG/main" r:embed="rId6"/>
                 </a:ext>
               </a:extLst>
             </a:blip>
@@ -3762,10 +3769,10 @@
             </a:pathLst>
           </a:custGeom>
           <a:blipFill>
-            <a:blip>
+            <a:blip r:embed="rId5">
               <a:extLst>
                 <a:ext uri="{96DAC541-7B7A-43D3-8B79-37D633B846F1}">
-                  <asvg:svgBlip xmlns:asvg="http://schemas.microsoft.com/office/drawing/2016/SVG/main" r:embed="rId4"/>
+                  <asvg:svgBlip xmlns:asvg="http://schemas.microsoft.com/office/drawing/2016/SVG/main" r:embed="rId6"/>
                 </a:ext>
               </a:extLst>
             </a:blip>
@@ -4133,10 +4140,10 @@
             </a:pathLst>
           </a:custGeom>
           <a:blipFill>
-            <a:blip>
+            <a:blip r:embed="rId3">
               <a:extLst>
                 <a:ext uri="{96DAC541-7B7A-43D3-8B79-37D633B846F1}">
-                  <asvg:svgBlip xmlns:asvg="http://schemas.microsoft.com/office/drawing/2016/SVG/main" r:embed="rId3"/>
+                  <asvg:svgBlip xmlns:asvg="http://schemas.microsoft.com/office/drawing/2016/SVG/main" r:embed="rId4"/>
                 </a:ext>
               </a:extLst>
             </a:blip>
@@ -4279,10 +4286,10 @@
             </a:pathLst>
           </a:custGeom>
           <a:blipFill>
-            <a:blip>
+            <a:blip r:embed="rId5">
               <a:extLst>
                 <a:ext uri="{96DAC541-7B7A-43D3-8B79-37D633B846F1}">
-                  <asvg:svgBlip xmlns:asvg="http://schemas.microsoft.com/office/drawing/2016/SVG/main" r:embed="rId4"/>
+                  <asvg:svgBlip xmlns:asvg="http://schemas.microsoft.com/office/drawing/2016/SVG/main" r:embed="rId6"/>
                 </a:ext>
               </a:extLst>
             </a:blip>
@@ -4425,10 +4432,10 @@
             </a:pathLst>
           </a:custGeom>
           <a:blipFill>
-            <a:blip>
+            <a:blip r:embed="rId5">
               <a:extLst>
                 <a:ext uri="{96DAC541-7B7A-43D3-8B79-37D633B846F1}">
-                  <asvg:svgBlip xmlns:asvg="http://schemas.microsoft.com/office/drawing/2016/SVG/main" r:embed="rId4"/>
+                  <asvg:svgBlip xmlns:asvg="http://schemas.microsoft.com/office/drawing/2016/SVG/main" r:embed="rId6"/>
                 </a:ext>
               </a:extLst>
             </a:blip>
@@ -4767,10 +4774,10 @@
             </a:pathLst>
           </a:custGeom>
           <a:blipFill>
-            <a:blip>
+            <a:blip r:embed="rId3">
               <a:extLst>
                 <a:ext uri="{96DAC541-7B7A-43D3-8B79-37D633B846F1}">
-                  <asvg:svgBlip xmlns:asvg="http://schemas.microsoft.com/office/drawing/2016/SVG/main" r:embed="rId3"/>
+                  <asvg:svgBlip xmlns:asvg="http://schemas.microsoft.com/office/drawing/2016/SVG/main" r:embed="rId4"/>
                 </a:ext>
               </a:extLst>
             </a:blip>
@@ -4913,10 +4920,10 @@
             </a:pathLst>
           </a:custGeom>
           <a:blipFill>
-            <a:blip>
+            <a:blip r:embed="rId3">
               <a:extLst>
                 <a:ext uri="{96DAC541-7B7A-43D3-8B79-37D633B846F1}">
-                  <asvg:svgBlip xmlns:asvg="http://schemas.microsoft.com/office/drawing/2016/SVG/main" r:embed="rId3"/>
+                  <asvg:svgBlip xmlns:asvg="http://schemas.microsoft.com/office/drawing/2016/SVG/main" r:embed="rId4"/>
                 </a:ext>
               </a:extLst>
             </a:blip>
@@ -5114,7 +5121,7 @@
                 <a:latin typeface="Calibri"/>
                 <a:cs typeface="Calibri"/>
               </a:rPr>
-              <a:t>Movement is unreliable — the rover can slip sideways or stall</a:t>
+              <a:t>Movement is unreliable - the rover can slip sideways or stall</a:t>
             </a:r>
           </a:p>
           <a:p>
@@ -5150,7 +5157,7 @@
           <p:nvPr/>
         </p:nvPicPr>
         <p:blipFill>
-          <a:blip r:embed="rId4"/>
+          <a:blip r:embed="rId5"/>
           <a:stretch>
             <a:fillRect/>
           </a:stretch>
@@ -5499,10 +5506,10 @@
             </a:pathLst>
           </a:custGeom>
           <a:blipFill>
-            <a:blip>
+            <a:blip r:embed="rId3">
               <a:extLst>
                 <a:ext uri="{96DAC541-7B7A-43D3-8B79-37D633B846F1}">
-                  <asvg:svgBlip xmlns:asvg="http://schemas.microsoft.com/office/drawing/2016/SVG/main" r:embed="rId3"/>
+                  <asvg:svgBlip xmlns:asvg="http://schemas.microsoft.com/office/drawing/2016/SVG/main" r:embed="rId4"/>
                 </a:ext>
               </a:extLst>
             </a:blip>
@@ -5645,10 +5652,10 @@
             </a:pathLst>
           </a:custGeom>
           <a:blipFill>
-            <a:blip>
+            <a:blip r:embed="rId3">
               <a:extLst>
                 <a:ext uri="{96DAC541-7B7A-43D3-8B79-37D633B846F1}">
-                  <asvg:svgBlip xmlns:asvg="http://schemas.microsoft.com/office/drawing/2016/SVG/main" r:embed="rId3"/>
+                  <asvg:svgBlip xmlns:asvg="http://schemas.microsoft.com/office/drawing/2016/SVG/main" r:embed="rId4"/>
                 </a:ext>
               </a:extLst>
             </a:blip>
@@ -6437,10 +6444,10 @@
             </a:pathLst>
           </a:custGeom>
           <a:blipFill>
-            <a:blip>
+            <a:blip r:embed="rId3">
               <a:extLst>
                 <a:ext uri="{96DAC541-7B7A-43D3-8B79-37D633B846F1}">
-                  <asvg:svgBlip xmlns:asvg="http://schemas.microsoft.com/office/drawing/2016/SVG/main" r:embed="rId3"/>
+                  <asvg:svgBlip xmlns:asvg="http://schemas.microsoft.com/office/drawing/2016/SVG/main" r:embed="rId4"/>
                 </a:ext>
               </a:extLst>
             </a:blip>
@@ -6583,10 +6590,10 @@
             </a:pathLst>
           </a:custGeom>
           <a:blipFill>
-            <a:blip>
+            <a:blip r:embed="rId3">
               <a:extLst>
                 <a:ext uri="{96DAC541-7B7A-43D3-8B79-37D633B846F1}">
-                  <asvg:svgBlip xmlns:asvg="http://schemas.microsoft.com/office/drawing/2016/SVG/main" r:embed="rId3"/>
+                  <asvg:svgBlip xmlns:asvg="http://schemas.microsoft.com/office/drawing/2016/SVG/main" r:embed="rId4"/>
                 </a:ext>
               </a:extLst>
             </a:blip>
@@ -7198,10 +7205,10 @@
             </a:pathLst>
           </a:custGeom>
           <a:blipFill>
-            <a:blip>
+            <a:blip r:embed="rId3">
               <a:extLst>
                 <a:ext uri="{96DAC541-7B7A-43D3-8B79-37D633B846F1}">
-                  <asvg:svgBlip xmlns:asvg="http://schemas.microsoft.com/office/drawing/2016/SVG/main" r:embed="rId3"/>
+                  <asvg:svgBlip xmlns:asvg="http://schemas.microsoft.com/office/drawing/2016/SVG/main" r:embed="rId4"/>
                 </a:ext>
               </a:extLst>
             </a:blip>
@@ -7344,10 +7351,10 @@
             </a:pathLst>
           </a:custGeom>
           <a:blipFill>
-            <a:blip>
+            <a:blip r:embed="rId3">
               <a:extLst>
                 <a:ext uri="{96DAC541-7B7A-43D3-8B79-37D633B846F1}">
-                  <asvg:svgBlip xmlns:asvg="http://schemas.microsoft.com/office/drawing/2016/SVG/main" r:embed="rId3"/>
+                  <asvg:svgBlip xmlns:asvg="http://schemas.microsoft.com/office/drawing/2016/SVG/main" r:embed="rId4"/>
                 </a:ext>
               </a:extLst>
             </a:blip>
@@ -7451,7 +7458,7 @@
           <p:nvPr/>
         </p:nvPicPr>
         <p:blipFill>
-          <a:blip r:embed="rId4"/>
+          <a:blip r:embed="rId5"/>
           <a:stretch>
             <a:fillRect/>
           </a:stretch>
@@ -7508,7 +7515,7 @@
                 <a:latin typeface="Calibri"/>
                 <a:cs typeface="Calibri"/>
               </a:rPr>
-              <a:t>One optimal action per cell — a complete plan, not one path</a:t>
+              <a:t>One optimal action per cell - a complete plan, not one path</a:t>
             </a:r>
           </a:p>
           <a:p>
@@ -7552,7 +7559,7 @@
                 <a:latin typeface="Calibri"/>
                 <a:cs typeface="Calibri"/>
               </a:rPr>
-              <a:t>Robust by construction — even a slip lands on a cell that already has a plan</a:t>
+              <a:t>Robust by construction, even a slip lands on a cell that already has a plan</a:t>
             </a:r>
           </a:p>
         </p:txBody>
@@ -7886,10 +7893,10 @@
             </a:pathLst>
           </a:custGeom>
           <a:blipFill>
-            <a:blip>
+            <a:blip r:embed="rId3">
               <a:extLst>
                 <a:ext uri="{96DAC541-7B7A-43D3-8B79-37D633B846F1}">
-                  <asvg:svgBlip xmlns:asvg="http://schemas.microsoft.com/office/drawing/2016/SVG/main" r:embed="rId3"/>
+                  <asvg:svgBlip xmlns:asvg="http://schemas.microsoft.com/office/drawing/2016/SVG/main" r:embed="rId4"/>
                 </a:ext>
               </a:extLst>
             </a:blip>
@@ -8032,10 +8039,10 @@
             </a:pathLst>
           </a:custGeom>
           <a:blipFill>
-            <a:blip>
+            <a:blip r:embed="rId3">
               <a:extLst>
                 <a:ext uri="{96DAC541-7B7A-43D3-8B79-37D633B846F1}">
-                  <asvg:svgBlip xmlns:asvg="http://schemas.microsoft.com/office/drawing/2016/SVG/main" r:embed="rId3"/>
+                  <asvg:svgBlip xmlns:asvg="http://schemas.microsoft.com/office/drawing/2016/SVG/main" r:embed="rId4"/>
                 </a:ext>
               </a:extLst>
             </a:blip>
@@ -8247,7 +8254,7 @@
           <p:nvPr/>
         </p:nvPicPr>
         <p:blipFill>
-          <a:blip r:embed="rId4"/>
+          <a:blip r:embed="rId5"/>
           <a:stretch>
             <a:fillRect/>
           </a:stretch>
@@ -8596,10 +8603,10 @@
             </a:pathLst>
           </a:custGeom>
           <a:blipFill>
-            <a:blip>
+            <a:blip r:embed="rId3">
               <a:extLst>
                 <a:ext uri="{96DAC541-7B7A-43D3-8B79-37D633B846F1}">
-                  <asvg:svgBlip xmlns:asvg="http://schemas.microsoft.com/office/drawing/2016/SVG/main" r:embed="rId3"/>
+                  <asvg:svgBlip xmlns:asvg="http://schemas.microsoft.com/office/drawing/2016/SVG/main" r:embed="rId4"/>
                 </a:ext>
               </a:extLst>
             </a:blip>
@@ -8742,10 +8749,10 @@
             </a:pathLst>
           </a:custGeom>
           <a:blipFill>
-            <a:blip>
+            <a:blip r:embed="rId3">
               <a:extLst>
                 <a:ext uri="{96DAC541-7B7A-43D3-8B79-37D633B846F1}">
-                  <asvg:svgBlip xmlns:asvg="http://schemas.microsoft.com/office/drawing/2016/SVG/main" r:embed="rId3"/>
+                  <asvg:svgBlip xmlns:asvg="http://schemas.microsoft.com/office/drawing/2016/SVG/main" r:embed="rId4"/>
                 </a:ext>
               </a:extLst>
             </a:blip>
@@ -8849,7 +8856,7 @@
           <p:nvPr/>
         </p:nvPicPr>
         <p:blipFill>
-          <a:blip r:embed="rId4"/>
+          <a:blip r:embed="rId5"/>
           <a:stretch>
             <a:fillRect/>
           </a:stretch>
@@ -9369,10 +9376,10 @@
             </a:pathLst>
           </a:custGeom>
           <a:blipFill>
-            <a:blip>
+            <a:blip r:embed="rId3">
               <a:extLst>
                 <a:ext uri="{96DAC541-7B7A-43D3-8B79-37D633B846F1}">
-                  <asvg:svgBlip xmlns:asvg="http://schemas.microsoft.com/office/drawing/2016/SVG/main" r:embed="rId3"/>
+                  <asvg:svgBlip xmlns:asvg="http://schemas.microsoft.com/office/drawing/2016/SVG/main" r:embed="rId4"/>
                 </a:ext>
               </a:extLst>
             </a:blip>
@@ -9515,10 +9522,10 @@
             </a:pathLst>
           </a:custGeom>
           <a:blipFill>
-            <a:blip>
+            <a:blip r:embed="rId3">
               <a:extLst>
                 <a:ext uri="{96DAC541-7B7A-43D3-8B79-37D633B846F1}">
-                  <asvg:svgBlip xmlns:asvg="http://schemas.microsoft.com/office/drawing/2016/SVG/main" r:embed="rId3"/>
+                  <asvg:svgBlip xmlns:asvg="http://schemas.microsoft.com/office/drawing/2016/SVG/main" r:embed="rId4"/>
                 </a:ext>
               </a:extLst>
             </a:blip>
@@ -9694,7 +9701,7 @@
                 <a:latin typeface="Calibri"/>
                 <a:cs typeface="Calibri"/>
               </a:rPr>
-              <a:t>MDP survives 60% of missions — double the greedy baseline</a:t>
+              <a:t>MDP survives 60% of missions - double the greedy baseline</a:t>
             </a:r>
           </a:p>
           <a:p>
@@ -9730,7 +9737,7 @@
           <p:nvPr/>
         </p:nvPicPr>
         <p:blipFill>
-          <a:blip r:embed="rId4"/>
+          <a:blip r:embed="rId5"/>
           <a:stretch>
             <a:fillRect/>
           </a:stretch>
@@ -10079,10 +10086,10 @@
             </a:pathLst>
           </a:custGeom>
           <a:blipFill>
-            <a:blip>
+            <a:blip r:embed="rId3">
               <a:extLst>
                 <a:ext uri="{96DAC541-7B7A-43D3-8B79-37D633B846F1}">
-                  <asvg:svgBlip xmlns:asvg="http://schemas.microsoft.com/office/drawing/2016/SVG/main" r:embed="rId3"/>
+                  <asvg:svgBlip xmlns:asvg="http://schemas.microsoft.com/office/drawing/2016/SVG/main" r:embed="rId4"/>
                 </a:ext>
               </a:extLst>
             </a:blip>
@@ -10225,10 +10232,10 @@
             </a:pathLst>
           </a:custGeom>
           <a:blipFill>
-            <a:blip>
+            <a:blip r:embed="rId3">
               <a:extLst>
                 <a:ext uri="{96DAC541-7B7A-43D3-8B79-37D633B846F1}">
-                  <asvg:svgBlip xmlns:asvg="http://schemas.microsoft.com/office/drawing/2016/SVG/main" r:embed="rId3"/>
+                  <asvg:svgBlip xmlns:asvg="http://schemas.microsoft.com/office/drawing/2016/SVG/main" r:embed="rId4"/>
                 </a:ext>
               </a:extLst>
             </a:blip>
@@ -10467,7 +10474,27 @@
                 <a:latin typeface="Cambria"/>
                 <a:cs typeface="Cambria"/>
               </a:rPr>
-              <a:t>“The reward model IS the specification.”</a:t>
+              <a:t>“The reward </a:t>
+            </a:r>
+            <a:r>
+              <a:rPr lang="en-US" sz="2800" b="1" i="1">
+                <a:solidFill>
+                  <a:srgbClr val="1D348A"/>
+                </a:solidFill>
+                <a:latin typeface="Cambria"/>
+                <a:cs typeface="Cambria"/>
+              </a:rPr>
+              <a:t>model is </a:t>
+            </a:r>
+            <a:r>
+              <a:rPr lang="en-US" sz="2800" b="1" i="1" dirty="0">
+                <a:solidFill>
+                  <a:srgbClr val="1D348A"/>
+                </a:solidFill>
+                <a:latin typeface="Cambria"/>
+                <a:cs typeface="Cambria"/>
+              </a:rPr>
+              <a:t>the specification.”</a:t>
             </a:r>
           </a:p>
         </p:txBody>

--- a/others/final_presentation.pptx
+++ b/others/final_presentation.pptx
@@ -5121,7 +5121,7 @@
                 <a:latin typeface="Calibri"/>
                 <a:cs typeface="Calibri"/>
               </a:rPr>
-              <a:t>Movement is unreliable - the rover can slip sideways or stall</a:t>
+              <a:t>Movement is unreliable; the rover can slip sideways or stall</a:t>
             </a:r>
           </a:p>
           <a:p>
@@ -7515,7 +7515,7 @@
                 <a:latin typeface="Calibri"/>
                 <a:cs typeface="Calibri"/>
               </a:rPr>
-              <a:t>One optimal action per cell - a complete plan, not one path</a:t>
+              <a:t>One optimal action per cell: a complete plan, not one path</a:t>
             </a:r>
           </a:p>
           <a:p>
@@ -7559,7 +7559,7 @@
                 <a:latin typeface="Calibri"/>
                 <a:cs typeface="Calibri"/>
               </a:rPr>
-              <a:t>Robust by construction, even a slip lands on a cell that already has a plan</a:t>
+              <a:t>Robust by construction, even if a slip lands on a cell that already has a plan</a:t>
             </a:r>
           </a:p>
         </p:txBody>
@@ -9679,7 +9679,7 @@
                 <a:latin typeface="Calibri"/>
                 <a:cs typeface="Calibri"/>
               </a:rPr>
-              <a:t>Only the MDP agent earns positive reward: +42 vs −124 vs −180</a:t>
+              <a:t>Only the MDP agent earns a positive reward: +42 vs −124 vs −180</a:t>
             </a:r>
           </a:p>
           <a:p>
@@ -9701,7 +9701,7 @@
                 <a:latin typeface="Calibri"/>
                 <a:cs typeface="Calibri"/>
               </a:rPr>
-              <a:t>MDP survives 60% of missions - double the greedy baseline</a:t>
+              <a:t>MDP survives 60% of missions, double the greedy baseline</a:t>
             </a:r>
           </a:p>
           <a:p>
@@ -10474,27 +10474,7 @@
                 <a:latin typeface="Cambria"/>
                 <a:cs typeface="Cambria"/>
               </a:rPr>
-              <a:t>“The reward </a:t>
-            </a:r>
-            <a:r>
-              <a:rPr lang="en-US" sz="2800" b="1" i="1">
-                <a:solidFill>
-                  <a:srgbClr val="1D348A"/>
-                </a:solidFill>
-                <a:latin typeface="Cambria"/>
-                <a:cs typeface="Cambria"/>
-              </a:rPr>
-              <a:t>model is </a:t>
-            </a:r>
-            <a:r>
-              <a:rPr lang="en-US" sz="2800" b="1" i="1" dirty="0">
-                <a:solidFill>
-                  <a:srgbClr val="1D348A"/>
-                </a:solidFill>
-                <a:latin typeface="Cambria"/>
-                <a:cs typeface="Cambria"/>
-              </a:rPr>
-              <a:t>the specification.”</a:t>
+              <a:t>“The reward model is the specification.”</a:t>
             </a:r>
           </a:p>
         </p:txBody>

--- a/others/final_presentation.pptx
+++ b/others/final_presentation.pptx
@@ -4,6 +4,9 @@
   <p:sldMasterIdLst>
     <p:sldMasterId id="2147483648" r:id="rId1"/>
   </p:sldMasterIdLst>
+  <p:notesMasterIdLst>
+    <p:notesMasterId r:id="rId12"/>
+  </p:notesMasterIdLst>
   <p:sldIdLst>
     <p:sldId id="256" r:id="rId2"/>
     <p:sldId id="257" r:id="rId3"/>
@@ -21,29 +24,29 @@
   <p:embeddedFontLst>
     <p:embeddedFont>
       <p:font typeface="Calibri" panose="020F0502020204030204" pitchFamily="34" charset="0"/>
-      <p:regular r:id="rId12"/>
-      <p:bold r:id="rId13"/>
-      <p:italic r:id="rId14"/>
-      <p:boldItalic r:id="rId15"/>
+      <p:regular r:id="rId13"/>
+      <p:bold r:id="rId14"/>
+      <p:italic r:id="rId15"/>
+      <p:boldItalic r:id="rId16"/>
     </p:embeddedFont>
     <p:embeddedFont>
       <p:font typeface="Cambria" panose="02040503050406030204" pitchFamily="18" charset="0"/>
-      <p:regular r:id="rId16"/>
-      <p:bold r:id="rId17"/>
-      <p:italic r:id="rId18"/>
-      <p:boldItalic r:id="rId19"/>
+      <p:regular r:id="rId17"/>
+      <p:bold r:id="rId18"/>
+      <p:italic r:id="rId19"/>
+      <p:boldItalic r:id="rId20"/>
     </p:embeddedFont>
     <p:embeddedFont>
       <p:font typeface="Roca Two Bold" panose="020B0604020202020204" charset="0"/>
-      <p:regular r:id="rId20"/>
+      <p:regular r:id="rId21"/>
     </p:embeddedFont>
     <p:embeddedFont>
       <p:font typeface="Roca Two Heavy" panose="020B0604020202020204" charset="0"/>
-      <p:regular r:id="rId21"/>
+      <p:regular r:id="rId22"/>
     </p:embeddedFont>
     <p:embeddedFont>
       <p:font typeface="TT Chocolates Bold" panose="020B0604020202020204" charset="0"/>
-      <p:regular r:id="rId22"/>
+      <p:regular r:id="rId23"/>
     </p:embeddedFont>
   </p:embeddedFontLst>
   <p:defaultTextStyle>
@@ -160,6 +163,355 @@
 </p:presentation>
 </file>
 
+<file path=ppt/notesMasters/notesMaster1.xml><?xml version="1.0" encoding="utf-8"?>
+<p:notesMaster xmlns:a="http://schemas.openxmlformats.org/drawingml/2006/main" xmlns:r="http://schemas.openxmlformats.org/officeDocument/2006/relationships" xmlns:p="http://schemas.openxmlformats.org/presentationml/2006/main">
+  <p:cSld>
+    <p:bg>
+      <p:bgRef idx="1001">
+        <a:schemeClr val="bg1"/>
+      </p:bgRef>
+    </p:bg>
+    <p:spTree>
+      <p:nvGrpSpPr>
+        <p:cNvPr id="1" name=""/>
+        <p:cNvGrpSpPr/>
+        <p:nvPr/>
+      </p:nvGrpSpPr>
+      <p:grpSpPr>
+        <a:xfrm>
+          <a:off x="0" y="0"/>
+          <a:ext cx="0" cy="0"/>
+          <a:chOff x="0" y="0"/>
+          <a:chExt cx="0" cy="0"/>
+        </a:xfrm>
+      </p:grpSpPr>
+      <p:sp>
+        <p:nvSpPr>
+          <p:cNvPr id="2" name="Header Placeholder 1"/>
+          <p:cNvSpPr>
+            <a:spLocks noGrp="1"/>
+          </p:cNvSpPr>
+          <p:nvPr>
+            <p:ph type="hdr" sz="quarter"/>
+          </p:nvPr>
+        </p:nvSpPr>
+        <p:spPr>
+          <a:xfrm>
+            <a:off x="0" y="0"/>
+            <a:ext cx="2971800" cy="458788"/>
+          </a:xfrm>
+          <a:prstGeom prst="rect">
+            <a:avLst/>
+          </a:prstGeom>
+        </p:spPr>
+        <p:txBody>
+          <a:bodyPr vert="horz" lIns="91440" tIns="45720" rIns="91440" bIns="45720" rtlCol="0"/>
+          <a:lstStyle>
+            <a:lvl1pPr algn="l">
+              <a:defRPr sz="1200"/>
+            </a:lvl1pPr>
+          </a:lstStyle>
+          <a:p>
+            <a:endParaRPr lang="en-US"/>
+          </a:p>
+        </p:txBody>
+      </p:sp>
+      <p:sp>
+        <p:nvSpPr>
+          <p:cNvPr id="3" name="Date Placeholder 2"/>
+          <p:cNvSpPr>
+            <a:spLocks noGrp="1"/>
+          </p:cNvSpPr>
+          <p:nvPr>
+            <p:ph type="dt" idx="1"/>
+          </p:nvPr>
+        </p:nvSpPr>
+        <p:spPr>
+          <a:xfrm>
+            <a:off x="3884613" y="0"/>
+            <a:ext cx="2971800" cy="458788"/>
+          </a:xfrm>
+          <a:prstGeom prst="rect">
+            <a:avLst/>
+          </a:prstGeom>
+        </p:spPr>
+        <p:txBody>
+          <a:bodyPr vert="horz" lIns="91440" tIns="45720" rIns="91440" bIns="45720" rtlCol="0"/>
+          <a:lstStyle>
+            <a:lvl1pPr algn="r">
+              <a:defRPr sz="1200"/>
+            </a:lvl1pPr>
+          </a:lstStyle>
+          <a:p>
+            <a:fld id="{232B0BE1-19CB-465C-9D51-0D3E86F4FB38}" type="datetimeFigureOut">
+              <a:rPr lang="en-US" smtClean="0"/>
+              <a:t>8/27/2026</a:t>
+            </a:fld>
+            <a:endParaRPr lang="en-US"/>
+          </a:p>
+        </p:txBody>
+      </p:sp>
+      <p:sp>
+        <p:nvSpPr>
+          <p:cNvPr id="4" name="Slide Image Placeholder 3"/>
+          <p:cNvSpPr>
+            <a:spLocks noGrp="1" noRot="1" noChangeAspect="1"/>
+          </p:cNvSpPr>
+          <p:nvPr>
+            <p:ph type="sldImg" idx="2"/>
+          </p:nvPr>
+        </p:nvSpPr>
+        <p:spPr>
+          <a:xfrm>
+            <a:off x="685800" y="1143000"/>
+            <a:ext cx="5486400" cy="3086100"/>
+          </a:xfrm>
+          <a:prstGeom prst="rect">
+            <a:avLst/>
+          </a:prstGeom>
+          <a:noFill/>
+          <a:ln w="12700">
+            <a:solidFill>
+              <a:prstClr val="black"/>
+            </a:solidFill>
+          </a:ln>
+        </p:spPr>
+        <p:txBody>
+          <a:bodyPr vert="horz" lIns="91440" tIns="45720" rIns="91440" bIns="45720" rtlCol="0" anchor="ctr"/>
+          <a:lstStyle/>
+          <a:p>
+            <a:endParaRPr lang="en-US"/>
+          </a:p>
+        </p:txBody>
+      </p:sp>
+      <p:sp>
+        <p:nvSpPr>
+          <p:cNvPr id="5" name="Notes Placeholder 4"/>
+          <p:cNvSpPr>
+            <a:spLocks noGrp="1"/>
+          </p:cNvSpPr>
+          <p:nvPr>
+            <p:ph type="body" sz="quarter" idx="3"/>
+          </p:nvPr>
+        </p:nvSpPr>
+        <p:spPr>
+          <a:xfrm>
+            <a:off x="685800" y="4400550"/>
+            <a:ext cx="5486400" cy="3600450"/>
+          </a:xfrm>
+          <a:prstGeom prst="rect">
+            <a:avLst/>
+          </a:prstGeom>
+        </p:spPr>
+        <p:txBody>
+          <a:bodyPr vert="horz" lIns="91440" tIns="45720" rIns="91440" bIns="45720" rtlCol="0"/>
+          <a:lstStyle/>
+          <a:p>
+            <a:pPr lvl="0"/>
+            <a:r>
+              <a:rPr lang="en-US"/>
+              <a:t>Click to edit Master text styles</a:t>
+            </a:r>
+          </a:p>
+          <a:p>
+            <a:pPr lvl="1"/>
+            <a:r>
+              <a:rPr lang="en-US"/>
+              <a:t>Second level</a:t>
+            </a:r>
+          </a:p>
+          <a:p>
+            <a:pPr lvl="2"/>
+            <a:r>
+              <a:rPr lang="en-US"/>
+              <a:t>Third level</a:t>
+            </a:r>
+          </a:p>
+          <a:p>
+            <a:pPr lvl="3"/>
+            <a:r>
+              <a:rPr lang="en-US"/>
+              <a:t>Fourth level</a:t>
+            </a:r>
+          </a:p>
+          <a:p>
+            <a:pPr lvl="4"/>
+            <a:r>
+              <a:rPr lang="en-US"/>
+              <a:t>Fifth level</a:t>
+            </a:r>
+          </a:p>
+        </p:txBody>
+      </p:sp>
+      <p:sp>
+        <p:nvSpPr>
+          <p:cNvPr id="6" name="Footer Placeholder 5"/>
+          <p:cNvSpPr>
+            <a:spLocks noGrp="1"/>
+          </p:cNvSpPr>
+          <p:nvPr>
+            <p:ph type="ftr" sz="quarter" idx="4"/>
+          </p:nvPr>
+        </p:nvSpPr>
+        <p:spPr>
+          <a:xfrm>
+            <a:off x="0" y="8685213"/>
+            <a:ext cx="2971800" cy="458787"/>
+          </a:xfrm>
+          <a:prstGeom prst="rect">
+            <a:avLst/>
+          </a:prstGeom>
+        </p:spPr>
+        <p:txBody>
+          <a:bodyPr vert="horz" lIns="91440" tIns="45720" rIns="91440" bIns="45720" rtlCol="0" anchor="b"/>
+          <a:lstStyle>
+            <a:lvl1pPr algn="l">
+              <a:defRPr sz="1200"/>
+            </a:lvl1pPr>
+          </a:lstStyle>
+          <a:p>
+            <a:endParaRPr lang="en-US"/>
+          </a:p>
+        </p:txBody>
+      </p:sp>
+      <p:sp>
+        <p:nvSpPr>
+          <p:cNvPr id="7" name="Slide Number Placeholder 6"/>
+          <p:cNvSpPr>
+            <a:spLocks noGrp="1"/>
+          </p:cNvSpPr>
+          <p:nvPr>
+            <p:ph type="sldNum" sz="quarter" idx="5"/>
+          </p:nvPr>
+        </p:nvSpPr>
+        <p:spPr>
+          <a:xfrm>
+            <a:off x="3884613" y="8685213"/>
+            <a:ext cx="2971800" cy="458787"/>
+          </a:xfrm>
+          <a:prstGeom prst="rect">
+            <a:avLst/>
+          </a:prstGeom>
+        </p:spPr>
+        <p:txBody>
+          <a:bodyPr vert="horz" lIns="91440" tIns="45720" rIns="91440" bIns="45720" rtlCol="0" anchor="b"/>
+          <a:lstStyle>
+            <a:lvl1pPr algn="r">
+              <a:defRPr sz="1200"/>
+            </a:lvl1pPr>
+          </a:lstStyle>
+          <a:p>
+            <a:fld id="{4541D504-B5CD-45F9-B8C4-2601419CBBFD}" type="slidenum">
+              <a:rPr lang="en-US" smtClean="0"/>
+              <a:t>‹#›</a:t>
+            </a:fld>
+            <a:endParaRPr lang="en-US"/>
+          </a:p>
+        </p:txBody>
+      </p:sp>
+    </p:spTree>
+    <p:extLst>
+      <p:ext uri="{BB962C8B-B14F-4D97-AF65-F5344CB8AC3E}">
+        <p14:creationId xmlns:p14="http://schemas.microsoft.com/office/powerpoint/2010/main" val="293628088"/>
+      </p:ext>
+    </p:extLst>
+  </p:cSld>
+  <p:clrMap bg1="lt1" tx1="dk1" bg2="lt2" tx2="dk2" accent1="accent1" accent2="accent2" accent3="accent3" accent4="accent4" accent5="accent5" accent6="accent6" hlink="hlink" folHlink="folHlink"/>
+  <p:notesStyle>
+    <a:lvl1pPr marL="0" algn="l" defTabSz="914400" rtl="0" eaLnBrk="1" latinLnBrk="0" hangingPunct="1">
+      <a:defRPr sz="1200" kern="1200">
+        <a:solidFill>
+          <a:schemeClr val="tx1"/>
+        </a:solidFill>
+        <a:latin typeface="+mn-lt"/>
+        <a:ea typeface="+mn-ea"/>
+        <a:cs typeface="+mn-cs"/>
+      </a:defRPr>
+    </a:lvl1pPr>
+    <a:lvl2pPr marL="457200" algn="l" defTabSz="914400" rtl="0" eaLnBrk="1" latinLnBrk="0" hangingPunct="1">
+      <a:defRPr sz="1200" kern="1200">
+        <a:solidFill>
+          <a:schemeClr val="tx1"/>
+        </a:solidFill>
+        <a:latin typeface="+mn-lt"/>
+        <a:ea typeface="+mn-ea"/>
+        <a:cs typeface="+mn-cs"/>
+      </a:defRPr>
+    </a:lvl2pPr>
+    <a:lvl3pPr marL="914400" algn="l" defTabSz="914400" rtl="0" eaLnBrk="1" latinLnBrk="0" hangingPunct="1">
+      <a:defRPr sz="1200" kern="1200">
+        <a:solidFill>
+          <a:schemeClr val="tx1"/>
+        </a:solidFill>
+        <a:latin typeface="+mn-lt"/>
+        <a:ea typeface="+mn-ea"/>
+        <a:cs typeface="+mn-cs"/>
+      </a:defRPr>
+    </a:lvl3pPr>
+    <a:lvl4pPr marL="1371600" algn="l" defTabSz="914400" rtl="0" eaLnBrk="1" latinLnBrk="0" hangingPunct="1">
+      <a:defRPr sz="1200" kern="1200">
+        <a:solidFill>
+          <a:schemeClr val="tx1"/>
+        </a:solidFill>
+        <a:latin typeface="+mn-lt"/>
+        <a:ea typeface="+mn-ea"/>
+        <a:cs typeface="+mn-cs"/>
+      </a:defRPr>
+    </a:lvl4pPr>
+    <a:lvl5pPr marL="1828800" algn="l" defTabSz="914400" rtl="0" eaLnBrk="1" latinLnBrk="0" hangingPunct="1">
+      <a:defRPr sz="1200" kern="1200">
+        <a:solidFill>
+          <a:schemeClr val="tx1"/>
+        </a:solidFill>
+        <a:latin typeface="+mn-lt"/>
+        <a:ea typeface="+mn-ea"/>
+        <a:cs typeface="+mn-cs"/>
+      </a:defRPr>
+    </a:lvl5pPr>
+    <a:lvl6pPr marL="2286000" algn="l" defTabSz="914400" rtl="0" eaLnBrk="1" latinLnBrk="0" hangingPunct="1">
+      <a:defRPr sz="1200" kern="1200">
+        <a:solidFill>
+          <a:schemeClr val="tx1"/>
+        </a:solidFill>
+        <a:latin typeface="+mn-lt"/>
+        <a:ea typeface="+mn-ea"/>
+        <a:cs typeface="+mn-cs"/>
+      </a:defRPr>
+    </a:lvl6pPr>
+    <a:lvl7pPr marL="2743200" algn="l" defTabSz="914400" rtl="0" eaLnBrk="1" latinLnBrk="0" hangingPunct="1">
+      <a:defRPr sz="1200" kern="1200">
+        <a:solidFill>
+          <a:schemeClr val="tx1"/>
+        </a:solidFill>
+        <a:latin typeface="+mn-lt"/>
+        <a:ea typeface="+mn-ea"/>
+        <a:cs typeface="+mn-cs"/>
+      </a:defRPr>
+    </a:lvl7pPr>
+    <a:lvl8pPr marL="3200400" algn="l" defTabSz="914400" rtl="0" eaLnBrk="1" latinLnBrk="0" hangingPunct="1">
+      <a:defRPr sz="1200" kern="1200">
+        <a:solidFill>
+          <a:schemeClr val="tx1"/>
+        </a:solidFill>
+        <a:latin typeface="+mn-lt"/>
+        <a:ea typeface="+mn-ea"/>
+        <a:cs typeface="+mn-cs"/>
+      </a:defRPr>
+    </a:lvl8pPr>
+    <a:lvl9pPr marL="3657600" algn="l" defTabSz="914400" rtl="0" eaLnBrk="1" latinLnBrk="0" hangingPunct="1">
+      <a:defRPr sz="1200" kern="1200">
+        <a:solidFill>
+          <a:schemeClr val="tx1"/>
+        </a:solidFill>
+        <a:latin typeface="+mn-lt"/>
+        <a:ea typeface="+mn-ea"/>
+        <a:cs typeface="+mn-cs"/>
+      </a:defRPr>
+    </a:lvl9pPr>
+  </p:notesStyle>
+</p:notesMaster>
+</file>
+
 <file path=ppt/slideLayouts/slideLayout1.xml><?xml version="1.0" encoding="utf-8"?>
 <p:sldLayout xmlns:a="http://schemas.openxmlformats.org/drawingml/2006/main" xmlns:r="http://schemas.openxmlformats.org/officeDocument/2006/relationships" xmlns:p="http://schemas.openxmlformats.org/presentationml/2006/main" type="title" preserve="1">
   <p:cSld name="Title Slide">
@@ -337,10 +689,9 @@
           <a:bodyPr/>
           <a:lstStyle/>
           <a:p>
-            <a:fld id="{1D8BD707-D9CF-40AE-B4C6-C98DA3205C09}" type="datetimeFigureOut">
+            <a:fld id="{E82657B9-0044-4C06-B0A0-4414DFF0A397}" type="datetime1">
               <a:rPr lang="en-US" smtClean="0"/>
-              <a:pPr/>
-              <a:t>8/26/2026</a:t>
+              <a:t>8/27/2026</a:t>
             </a:fld>
             <a:endParaRPr lang="en-US"/>
           </a:p>
@@ -361,7 +712,10 @@
           <a:bodyPr/>
           <a:lstStyle/>
           <a:p>
-            <a:endParaRPr lang="en-US"/>
+            <a:r>
+              <a:rPr lang="en-US"/>
+              <a:t>Group 05, Shakil Ahmed, Fahim Foysal, Shefa Tabassum , Tanvir Ahmed</a:t>
+            </a:r>
           </a:p>
         </p:txBody>
       </p:sp>
@@ -502,10 +856,9 @@
           <a:bodyPr/>
           <a:lstStyle/>
           <a:p>
-            <a:fld id="{1D8BD707-D9CF-40AE-B4C6-C98DA3205C09}" type="datetimeFigureOut">
+            <a:fld id="{4AB01351-CBE7-4442-B09C-71C138196C0B}" type="datetime1">
               <a:rPr lang="en-US" smtClean="0"/>
-              <a:pPr/>
-              <a:t>8/26/2026</a:t>
+              <a:t>8/27/2026</a:t>
             </a:fld>
             <a:endParaRPr lang="en-US"/>
           </a:p>
@@ -526,7 +879,10 @@
           <a:bodyPr/>
           <a:lstStyle/>
           <a:p>
-            <a:endParaRPr lang="en-US"/>
+            <a:r>
+              <a:rPr lang="en-US"/>
+              <a:t>Group 05, Shakil Ahmed, Fahim Foysal, Shefa Tabassum , Tanvir Ahmed</a:t>
+            </a:r>
           </a:p>
         </p:txBody>
       </p:sp>
@@ -677,10 +1033,9 @@
           <a:bodyPr/>
           <a:lstStyle/>
           <a:p>
-            <a:fld id="{1D8BD707-D9CF-40AE-B4C6-C98DA3205C09}" type="datetimeFigureOut">
+            <a:fld id="{6AB36C00-1C85-4A73-8B46-228F7F5F979B}" type="datetime1">
               <a:rPr lang="en-US" smtClean="0"/>
-              <a:pPr/>
-              <a:t>8/26/2026</a:t>
+              <a:t>8/27/2026</a:t>
             </a:fld>
             <a:endParaRPr lang="en-US"/>
           </a:p>
@@ -701,7 +1056,10 @@
           <a:bodyPr/>
           <a:lstStyle/>
           <a:p>
-            <a:endParaRPr lang="en-US"/>
+            <a:r>
+              <a:rPr lang="en-US"/>
+              <a:t>Group 05, Shakil Ahmed, Fahim Foysal, Shefa Tabassum , Tanvir Ahmed</a:t>
+            </a:r>
           </a:p>
         </p:txBody>
       </p:sp>
@@ -842,10 +1200,9 @@
           <a:bodyPr/>
           <a:lstStyle/>
           <a:p>
-            <a:fld id="{1D8BD707-D9CF-40AE-B4C6-C98DA3205C09}" type="datetimeFigureOut">
+            <a:fld id="{B8254F04-B6BF-4A6E-B52E-52F58816FE0C}" type="datetime1">
               <a:rPr lang="en-US" smtClean="0"/>
-              <a:pPr/>
-              <a:t>8/26/2026</a:t>
+              <a:t>8/27/2026</a:t>
             </a:fld>
             <a:endParaRPr lang="en-US"/>
           </a:p>
@@ -866,7 +1223,10 @@
           <a:bodyPr/>
           <a:lstStyle/>
           <a:p>
-            <a:endParaRPr lang="en-US"/>
+            <a:r>
+              <a:rPr lang="en-US"/>
+              <a:t>Group 05, Shakil Ahmed, Fahim Foysal, Shefa Tabassum , Tanvir Ahmed</a:t>
+            </a:r>
           </a:p>
         </p:txBody>
       </p:sp>
@@ -1084,10 +1444,9 @@
           <a:bodyPr/>
           <a:lstStyle/>
           <a:p>
-            <a:fld id="{1D8BD707-D9CF-40AE-B4C6-C98DA3205C09}" type="datetimeFigureOut">
+            <a:fld id="{1405B680-F0CF-463E-92F0-E54B6D1027B5}" type="datetime1">
               <a:rPr lang="en-US" smtClean="0"/>
-              <a:pPr/>
-              <a:t>8/26/2026</a:t>
+              <a:t>8/27/2026</a:t>
             </a:fld>
             <a:endParaRPr lang="en-US"/>
           </a:p>
@@ -1108,7 +1467,10 @@
           <a:bodyPr/>
           <a:lstStyle/>
           <a:p>
-            <a:endParaRPr lang="en-US"/>
+            <a:r>
+              <a:rPr lang="en-US"/>
+              <a:t>Group 05, Shakil Ahmed, Fahim Foysal, Shefa Tabassum , Tanvir Ahmed</a:t>
+            </a:r>
           </a:p>
         </p:txBody>
       </p:sp>
@@ -1366,10 +1728,9 @@
           <a:bodyPr/>
           <a:lstStyle/>
           <a:p>
-            <a:fld id="{1D8BD707-D9CF-40AE-B4C6-C98DA3205C09}" type="datetimeFigureOut">
+            <a:fld id="{B95A648B-082E-401F-8EB6-8CA1A94E5515}" type="datetime1">
               <a:rPr lang="en-US" smtClean="0"/>
-              <a:pPr/>
-              <a:t>8/26/2026</a:t>
+              <a:t>8/27/2026</a:t>
             </a:fld>
             <a:endParaRPr lang="en-US"/>
           </a:p>
@@ -1390,7 +1751,10 @@
           <a:bodyPr/>
           <a:lstStyle/>
           <a:p>
-            <a:endParaRPr lang="en-US"/>
+            <a:r>
+              <a:rPr lang="en-US"/>
+              <a:t>Group 05, Shakil Ahmed, Fahim Foysal, Shefa Tabassum , Tanvir Ahmed</a:t>
+            </a:r>
           </a:p>
         </p:txBody>
       </p:sp>
@@ -1782,10 +2146,9 @@
           <a:bodyPr/>
           <a:lstStyle/>
           <a:p>
-            <a:fld id="{1D8BD707-D9CF-40AE-B4C6-C98DA3205C09}" type="datetimeFigureOut">
+            <a:fld id="{0E01FBE6-E6F3-4C4B-8082-21FE5CD55602}" type="datetime1">
               <a:rPr lang="en-US" smtClean="0"/>
-              <a:pPr/>
-              <a:t>8/26/2026</a:t>
+              <a:t>8/27/2026</a:t>
             </a:fld>
             <a:endParaRPr lang="en-US"/>
           </a:p>
@@ -1806,7 +2169,10 @@
           <a:bodyPr/>
           <a:lstStyle/>
           <a:p>
-            <a:endParaRPr lang="en-US"/>
+            <a:r>
+              <a:rPr lang="en-US"/>
+              <a:t>Group 05, Shakil Ahmed, Fahim Foysal, Shefa Tabassum , Tanvir Ahmed</a:t>
+            </a:r>
           </a:p>
         </p:txBody>
       </p:sp>
@@ -1896,10 +2262,9 @@
           <a:bodyPr/>
           <a:lstStyle/>
           <a:p>
-            <a:fld id="{1D8BD707-D9CF-40AE-B4C6-C98DA3205C09}" type="datetimeFigureOut">
+            <a:fld id="{2FD012EE-B8C4-4B77-8EC6-5281F4ABE468}" type="datetime1">
               <a:rPr lang="en-US" smtClean="0"/>
-              <a:pPr/>
-              <a:t>8/26/2026</a:t>
+              <a:t>8/27/2026</a:t>
             </a:fld>
             <a:endParaRPr lang="en-US"/>
           </a:p>
@@ -1920,7 +2285,10 @@
           <a:bodyPr/>
           <a:lstStyle/>
           <a:p>
-            <a:endParaRPr lang="en-US"/>
+            <a:r>
+              <a:rPr lang="en-US"/>
+              <a:t>Group 05, Shakil Ahmed, Fahim Foysal, Shefa Tabassum , Tanvir Ahmed</a:t>
+            </a:r>
           </a:p>
         </p:txBody>
       </p:sp>
@@ -1988,10 +2356,9 @@
           <a:bodyPr/>
           <a:lstStyle/>
           <a:p>
-            <a:fld id="{1D8BD707-D9CF-40AE-B4C6-C98DA3205C09}" type="datetimeFigureOut">
+            <a:fld id="{31815FB5-6ECF-4F59-BC51-1752FF0E9E55}" type="datetime1">
               <a:rPr lang="en-US" smtClean="0"/>
-              <a:pPr/>
-              <a:t>8/26/2026</a:t>
+              <a:t>8/27/2026</a:t>
             </a:fld>
             <a:endParaRPr lang="en-US"/>
           </a:p>
@@ -2012,7 +2379,10 @@
           <a:bodyPr/>
           <a:lstStyle/>
           <a:p>
-            <a:endParaRPr lang="en-US"/>
+            <a:r>
+              <a:rPr lang="en-US"/>
+              <a:t>Group 05, Shakil Ahmed, Fahim Foysal, Shefa Tabassum , Tanvir Ahmed</a:t>
+            </a:r>
           </a:p>
         </p:txBody>
       </p:sp>
@@ -2260,10 +2630,9 @@
           <a:bodyPr/>
           <a:lstStyle/>
           <a:p>
-            <a:fld id="{1D8BD707-D9CF-40AE-B4C6-C98DA3205C09}" type="datetimeFigureOut">
+            <a:fld id="{D225465A-15B7-4039-A4B2-21951620281B}" type="datetime1">
               <a:rPr lang="en-US" smtClean="0"/>
-              <a:pPr/>
-              <a:t>8/26/2026</a:t>
+              <a:t>8/27/2026</a:t>
             </a:fld>
             <a:endParaRPr lang="en-US"/>
           </a:p>
@@ -2284,7 +2653,10 @@
           <a:bodyPr/>
           <a:lstStyle/>
           <a:p>
-            <a:endParaRPr lang="en-US"/>
+            <a:r>
+              <a:rPr lang="en-US"/>
+              <a:t>Group 05, Shakil Ahmed, Fahim Foysal, Shefa Tabassum , Tanvir Ahmed</a:t>
+            </a:r>
           </a:p>
         </p:txBody>
       </p:sp>
@@ -2509,10 +2881,9 @@
           <a:bodyPr/>
           <a:lstStyle/>
           <a:p>
-            <a:fld id="{1D8BD707-D9CF-40AE-B4C6-C98DA3205C09}" type="datetimeFigureOut">
+            <a:fld id="{BB1930E2-AA89-41CA-B928-650F39E1AA38}" type="datetime1">
               <a:rPr lang="en-US" smtClean="0"/>
-              <a:pPr/>
-              <a:t>8/26/2026</a:t>
+              <a:t>8/27/2026</a:t>
             </a:fld>
             <a:endParaRPr lang="en-US"/>
           </a:p>
@@ -2533,7 +2904,10 @@
           <a:bodyPr/>
           <a:lstStyle/>
           <a:p>
-            <a:endParaRPr lang="en-US"/>
+            <a:r>
+              <a:rPr lang="en-US"/>
+              <a:t>Group 05, Shakil Ahmed, Fahim Foysal, Shefa Tabassum , Tanvir Ahmed</a:t>
+            </a:r>
           </a:p>
         </p:txBody>
       </p:sp>
@@ -2717,10 +3091,9 @@
             </a:lvl1pPr>
           </a:lstStyle>
           <a:p>
-            <a:fld id="{1D8BD707-D9CF-40AE-B4C6-C98DA3205C09}" type="datetimeFigureOut">
+            <a:fld id="{7C1D685A-A592-4B18-951C-27A0B1F6728B}" type="datetime1">
               <a:rPr lang="en-US" smtClean="0"/>
-              <a:pPr/>
-              <a:t>8/26/2026</a:t>
+              <a:t>8/27/2026</a:t>
             </a:fld>
             <a:endParaRPr lang="en-US"/>
           </a:p>
@@ -2759,7 +3132,10 @@
             </a:lvl1pPr>
           </a:lstStyle>
           <a:p>
-            <a:endParaRPr lang="en-US"/>
+            <a:r>
+              <a:rPr lang="en-US"/>
+              <a:t>Group 05, Shakil Ahmed, Fahim Foysal, Shefa Tabassum , Tanvir Ahmed</a:t>
+            </a:r>
           </a:p>
         </p:txBody>
       </p:sp>
@@ -2821,6 +3197,7 @@
     <p:sldLayoutId id="2147483658" r:id="rId10"/>
     <p:sldLayoutId id="2147483659" r:id="rId11"/>
   </p:sldLayoutIdLst>
+  <p:hf sldNum="0" hdr="0" dt="0"/>
   <p:txStyles>
     <p:titleStyle>
       <a:lvl1pPr algn="ctr" defTabSz="914400" rtl="0" eaLnBrk="1" latinLnBrk="0" hangingPunct="1">
@@ -3864,6 +4241,59 @@
           </a:p>
         </p:txBody>
       </p:sp>
+      <p:sp>
+        <p:nvSpPr>
+          <p:cNvPr id="19" name="Footer Placeholder 18">
+            <a:extLst>
+              <a:ext uri="{FF2B5EF4-FFF2-40B4-BE49-F238E27FC236}">
+                <a16:creationId xmlns:a16="http://schemas.microsoft.com/office/drawing/2014/main" id="{F768FA2E-A9E4-46C0-8F9B-53E392275619}"/>
+              </a:ext>
+            </a:extLst>
+          </p:cNvPr>
+          <p:cNvSpPr>
+            <a:spLocks noGrp="1"/>
+          </p:cNvSpPr>
+          <p:nvPr>
+            <p:ph type="ftr" sz="quarter" idx="11"/>
+          </p:nvPr>
+        </p:nvSpPr>
+        <p:spPr>
+          <a:xfrm>
+            <a:off x="283771" y="10021413"/>
+            <a:ext cx="5410199" cy="132177"/>
+          </a:xfrm>
+        </p:spPr>
+        <p:txBody>
+          <a:bodyPr/>
+          <a:lstStyle/>
+          <a:p>
+            <a:r>
+              <a:rPr lang="en-US" dirty="0">
+                <a:solidFill>
+                  <a:schemeClr val="tx1"/>
+                </a:solidFill>
+              </a:rPr>
+              <a:t>Group 05, Shakil Ahmed, Fahim </a:t>
+            </a:r>
+            <a:r>
+              <a:rPr lang="en-US" dirty="0" err="1">
+                <a:solidFill>
+                  <a:schemeClr val="tx1"/>
+                </a:solidFill>
+              </a:rPr>
+              <a:t>Foysal</a:t>
+            </a:r>
+            <a:r>
+              <a:rPr lang="en-US" dirty="0">
+                <a:solidFill>
+                  <a:schemeClr val="tx1"/>
+                </a:solidFill>
+              </a:rPr>
+              <a:t>, Shefa Tabassum , Tanvir Ahmed</a:t>
+            </a:r>
+          </a:p>
+        </p:txBody>
+      </p:sp>
     </p:spTree>
   </p:cSld>
   <p:clrMapOvr>
@@ -4444,6 +4874,59 @@
             </a:stretch>
           </a:blipFill>
         </p:spPr>
+      </p:sp>
+      <p:sp>
+        <p:nvSpPr>
+          <p:cNvPr id="16" name="Footer Placeholder 15">
+            <a:extLst>
+              <a:ext uri="{FF2B5EF4-FFF2-40B4-BE49-F238E27FC236}">
+                <a16:creationId xmlns:a16="http://schemas.microsoft.com/office/drawing/2014/main" id="{052698CA-C525-49C2-A5AB-A6E8913062FA}"/>
+              </a:ext>
+            </a:extLst>
+          </p:cNvPr>
+          <p:cNvSpPr>
+            <a:spLocks noGrp="1"/>
+          </p:cNvSpPr>
+          <p:nvPr>
+            <p:ph type="ftr" sz="quarter" idx="11"/>
+          </p:nvPr>
+        </p:nvSpPr>
+        <p:spPr>
+          <a:xfrm>
+            <a:off x="223482" y="9942217"/>
+            <a:ext cx="4729518" cy="344783"/>
+          </a:xfrm>
+        </p:spPr>
+        <p:txBody>
+          <a:bodyPr/>
+          <a:lstStyle/>
+          <a:p>
+            <a:r>
+              <a:rPr lang="en-US" dirty="0">
+                <a:solidFill>
+                  <a:schemeClr val="tx1"/>
+                </a:solidFill>
+              </a:rPr>
+              <a:t>Group 05, Shakil Ahmed, Fahim </a:t>
+            </a:r>
+            <a:r>
+              <a:rPr lang="en-US" dirty="0" err="1">
+                <a:solidFill>
+                  <a:schemeClr val="tx1"/>
+                </a:solidFill>
+              </a:rPr>
+              <a:t>Foysal</a:t>
+            </a:r>
+            <a:r>
+              <a:rPr lang="en-US" dirty="0">
+                <a:solidFill>
+                  <a:schemeClr val="tx1"/>
+                </a:solidFill>
+              </a:rPr>
+              <a:t>, Shefa Tabassum , Tanvir Ahmed</a:t>
+            </a:r>
+          </a:p>
+        </p:txBody>
       </p:sp>
     </p:spTree>
   </p:cSld>
@@ -5177,6 +5660,59 @@
           </a:ln>
         </p:spPr>
       </p:pic>
+      <p:sp>
+        <p:nvSpPr>
+          <p:cNvPr id="16" name="Footer Placeholder 15">
+            <a:extLst>
+              <a:ext uri="{FF2B5EF4-FFF2-40B4-BE49-F238E27FC236}">
+                <a16:creationId xmlns:a16="http://schemas.microsoft.com/office/drawing/2014/main" id="{A0C61134-E94D-43BC-81A5-B70E87978268}"/>
+              </a:ext>
+            </a:extLst>
+          </p:cNvPr>
+          <p:cNvSpPr>
+            <a:spLocks noGrp="1"/>
+          </p:cNvSpPr>
+          <p:nvPr>
+            <p:ph type="ftr" sz="quarter" idx="11"/>
+          </p:nvPr>
+        </p:nvSpPr>
+        <p:spPr>
+          <a:xfrm>
+            <a:off x="558766" y="9995822"/>
+            <a:ext cx="4699034" cy="248894"/>
+          </a:xfrm>
+        </p:spPr>
+        <p:txBody>
+          <a:bodyPr/>
+          <a:lstStyle/>
+          <a:p>
+            <a:r>
+              <a:rPr lang="en-US" dirty="0">
+                <a:solidFill>
+                  <a:schemeClr val="tx1"/>
+                </a:solidFill>
+              </a:rPr>
+              <a:t>Group 05, Shakil Ahmed, Fahim </a:t>
+            </a:r>
+            <a:r>
+              <a:rPr lang="en-US" dirty="0" err="1">
+                <a:solidFill>
+                  <a:schemeClr val="tx1"/>
+                </a:solidFill>
+              </a:rPr>
+              <a:t>Foysal</a:t>
+            </a:r>
+            <a:r>
+              <a:rPr lang="en-US" dirty="0">
+                <a:solidFill>
+                  <a:schemeClr val="tx1"/>
+                </a:solidFill>
+              </a:rPr>
+              <a:t>, Shefa Tabassum , Tanvir Ahmed</a:t>
+            </a:r>
+          </a:p>
+        </p:txBody>
+      </p:sp>
     </p:spTree>
   </p:cSld>
   <p:clrMapOvr>
@@ -6115,6 +6651,59 @@
           </a:p>
         </p:txBody>
       </p:sp>
+      <p:sp>
+        <p:nvSpPr>
+          <p:cNvPr id="16" name="Footer Placeholder 15">
+            <a:extLst>
+              <a:ext uri="{FF2B5EF4-FFF2-40B4-BE49-F238E27FC236}">
+                <a16:creationId xmlns:a16="http://schemas.microsoft.com/office/drawing/2014/main" id="{923E0FEB-BA7C-4C4B-9C65-C43DAF83FA2F}"/>
+              </a:ext>
+            </a:extLst>
+          </p:cNvPr>
+          <p:cNvSpPr>
+            <a:spLocks noGrp="1"/>
+          </p:cNvSpPr>
+          <p:nvPr>
+            <p:ph type="ftr" sz="quarter" idx="11"/>
+          </p:nvPr>
+        </p:nvSpPr>
+        <p:spPr>
+          <a:xfrm>
+            <a:off x="349188" y="9959412"/>
+            <a:ext cx="4832412" cy="285304"/>
+          </a:xfrm>
+        </p:spPr>
+        <p:txBody>
+          <a:bodyPr/>
+          <a:lstStyle/>
+          <a:p>
+            <a:r>
+              <a:rPr lang="en-US" dirty="0">
+                <a:solidFill>
+                  <a:schemeClr val="tx1"/>
+                </a:solidFill>
+              </a:rPr>
+              <a:t>Group 05, Shakil Ahmed, Fahim </a:t>
+            </a:r>
+            <a:r>
+              <a:rPr lang="en-US" dirty="0" err="1">
+                <a:solidFill>
+                  <a:schemeClr val="tx1"/>
+                </a:solidFill>
+              </a:rPr>
+              <a:t>Foysal</a:t>
+            </a:r>
+            <a:r>
+              <a:rPr lang="en-US" dirty="0">
+                <a:solidFill>
+                  <a:schemeClr val="tx1"/>
+                </a:solidFill>
+              </a:rPr>
+              <a:t>, Shefa Tabassum , Tanvir Ahmed</a:t>
+            </a:r>
+          </a:p>
+        </p:txBody>
+      </p:sp>
     </p:spTree>
   </p:cSld>
   <p:clrMapOvr>
@@ -6876,6 +7465,59 @@
           </a:p>
         </p:txBody>
       </p:sp>
+      <p:sp>
+        <p:nvSpPr>
+          <p:cNvPr id="16" name="Footer Placeholder 15">
+            <a:extLst>
+              <a:ext uri="{FF2B5EF4-FFF2-40B4-BE49-F238E27FC236}">
+                <a16:creationId xmlns:a16="http://schemas.microsoft.com/office/drawing/2014/main" id="{EFAAA221-51A0-434C-8BCE-46A07577EE2A}"/>
+              </a:ext>
+            </a:extLst>
+          </p:cNvPr>
+          <p:cNvSpPr>
+            <a:spLocks noGrp="1"/>
+          </p:cNvSpPr>
+          <p:nvPr>
+            <p:ph type="ftr" sz="quarter" idx="11"/>
+          </p:nvPr>
+        </p:nvSpPr>
+        <p:spPr>
+          <a:xfrm>
+            <a:off x="515904" y="9983224"/>
+            <a:ext cx="5199096" cy="194249"/>
+          </a:xfrm>
+        </p:spPr>
+        <p:txBody>
+          <a:bodyPr/>
+          <a:lstStyle/>
+          <a:p>
+            <a:r>
+              <a:rPr lang="en-US" dirty="0">
+                <a:solidFill>
+                  <a:schemeClr val="tx1"/>
+                </a:solidFill>
+              </a:rPr>
+              <a:t>Group 05, Shakil Ahmed, Fahim </a:t>
+            </a:r>
+            <a:r>
+              <a:rPr lang="en-US" dirty="0" err="1">
+                <a:solidFill>
+                  <a:schemeClr val="tx1"/>
+                </a:solidFill>
+              </a:rPr>
+              <a:t>Foysal</a:t>
+            </a:r>
+            <a:r>
+              <a:rPr lang="en-US" dirty="0">
+                <a:solidFill>
+                  <a:schemeClr val="tx1"/>
+                </a:solidFill>
+              </a:rPr>
+              <a:t>, Shefa Tabassum , Tanvir Ahmed</a:t>
+            </a:r>
+          </a:p>
+        </p:txBody>
+      </p:sp>
     </p:spTree>
   </p:cSld>
   <p:clrMapOvr>
@@ -7564,6 +8206,59 @@
           </a:p>
         </p:txBody>
       </p:sp>
+      <p:sp>
+        <p:nvSpPr>
+          <p:cNvPr id="16" name="Footer Placeholder 15">
+            <a:extLst>
+              <a:ext uri="{FF2B5EF4-FFF2-40B4-BE49-F238E27FC236}">
+                <a16:creationId xmlns:a16="http://schemas.microsoft.com/office/drawing/2014/main" id="{2DF37DF5-33FF-4047-A277-DF1AFCDDFB47}"/>
+              </a:ext>
+            </a:extLst>
+          </p:cNvPr>
+          <p:cNvSpPr>
+            <a:spLocks noGrp="1"/>
+          </p:cNvSpPr>
+          <p:nvPr>
+            <p:ph type="ftr" sz="quarter" idx="11"/>
+          </p:nvPr>
+        </p:nvSpPr>
+        <p:spPr>
+          <a:xfrm>
+            <a:off x="358712" y="9959412"/>
+            <a:ext cx="4822887" cy="285304"/>
+          </a:xfrm>
+        </p:spPr>
+        <p:txBody>
+          <a:bodyPr/>
+          <a:lstStyle/>
+          <a:p>
+            <a:r>
+              <a:rPr lang="en-US" dirty="0">
+                <a:solidFill>
+                  <a:schemeClr val="tx1"/>
+                </a:solidFill>
+              </a:rPr>
+              <a:t>Group 05, Shakil Ahmed, Fahim </a:t>
+            </a:r>
+            <a:r>
+              <a:rPr lang="en-US" dirty="0" err="1">
+                <a:solidFill>
+                  <a:schemeClr val="tx1"/>
+                </a:solidFill>
+              </a:rPr>
+              <a:t>Foysal</a:t>
+            </a:r>
+            <a:r>
+              <a:rPr lang="en-US" dirty="0">
+                <a:solidFill>
+                  <a:schemeClr val="tx1"/>
+                </a:solidFill>
+              </a:rPr>
+              <a:t>, Shefa Tabassum , Tanvir Ahmed</a:t>
+            </a:r>
+          </a:p>
+        </p:txBody>
+      </p:sp>
     </p:spTree>
   </p:cSld>
   <p:clrMapOvr>
@@ -8274,6 +8969,59 @@
           </a:ln>
         </p:spPr>
       </p:pic>
+      <p:sp>
+        <p:nvSpPr>
+          <p:cNvPr id="16" name="Footer Placeholder 15">
+            <a:extLst>
+              <a:ext uri="{FF2B5EF4-FFF2-40B4-BE49-F238E27FC236}">
+                <a16:creationId xmlns:a16="http://schemas.microsoft.com/office/drawing/2014/main" id="{E666E767-FD4C-41AC-99E1-3E7A57E509F0}"/>
+              </a:ext>
+            </a:extLst>
+          </p:cNvPr>
+          <p:cNvSpPr>
+            <a:spLocks noGrp="1"/>
+          </p:cNvSpPr>
+          <p:nvPr>
+            <p:ph type="ftr" sz="quarter" idx="11"/>
+          </p:nvPr>
+        </p:nvSpPr>
+        <p:spPr>
+          <a:xfrm>
+            <a:off x="520666" y="10062152"/>
+            <a:ext cx="4889534" cy="182563"/>
+          </a:xfrm>
+        </p:spPr>
+        <p:txBody>
+          <a:bodyPr/>
+          <a:lstStyle/>
+          <a:p>
+            <a:r>
+              <a:rPr lang="en-US" dirty="0">
+                <a:solidFill>
+                  <a:schemeClr val="tx1"/>
+                </a:solidFill>
+              </a:rPr>
+              <a:t>Group 05, Shakil Ahmed, Fahim </a:t>
+            </a:r>
+            <a:r>
+              <a:rPr lang="en-US" dirty="0" err="1">
+                <a:solidFill>
+                  <a:schemeClr val="tx1"/>
+                </a:solidFill>
+              </a:rPr>
+              <a:t>Foysal</a:t>
+            </a:r>
+            <a:r>
+              <a:rPr lang="en-US" dirty="0">
+                <a:solidFill>
+                  <a:schemeClr val="tx1"/>
+                </a:solidFill>
+              </a:rPr>
+              <a:t>, Shefa Tabassum , Tanvir Ahmed</a:t>
+            </a:r>
+          </a:p>
+        </p:txBody>
+      </p:sp>
     </p:spTree>
   </p:cSld>
   <p:clrMapOvr>
@@ -9047,6 +9795,59 @@
           </a:p>
         </p:txBody>
       </p:sp>
+      <p:sp>
+        <p:nvSpPr>
+          <p:cNvPr id="16" name="Footer Placeholder 15">
+            <a:extLst>
+              <a:ext uri="{FF2B5EF4-FFF2-40B4-BE49-F238E27FC236}">
+                <a16:creationId xmlns:a16="http://schemas.microsoft.com/office/drawing/2014/main" id="{A022A323-9752-407F-9DB4-D87554D9CB15}"/>
+              </a:ext>
+            </a:extLst>
+          </p:cNvPr>
+          <p:cNvSpPr>
+            <a:spLocks noGrp="1"/>
+          </p:cNvSpPr>
+          <p:nvPr>
+            <p:ph type="ftr" sz="quarter" idx="11"/>
+          </p:nvPr>
+        </p:nvSpPr>
+        <p:spPr>
+          <a:xfrm>
+            <a:off x="544479" y="10027014"/>
+            <a:ext cx="5136174" cy="217702"/>
+          </a:xfrm>
+        </p:spPr>
+        <p:txBody>
+          <a:bodyPr/>
+          <a:lstStyle/>
+          <a:p>
+            <a:r>
+              <a:rPr lang="en-US" dirty="0">
+                <a:solidFill>
+                  <a:schemeClr val="tx1"/>
+                </a:solidFill>
+              </a:rPr>
+              <a:t>Group 05, Shakil Ahmed, Fahim </a:t>
+            </a:r>
+            <a:r>
+              <a:rPr lang="en-US" dirty="0" err="1">
+                <a:solidFill>
+                  <a:schemeClr val="tx1"/>
+                </a:solidFill>
+              </a:rPr>
+              <a:t>Foysal</a:t>
+            </a:r>
+            <a:r>
+              <a:rPr lang="en-US" dirty="0">
+                <a:solidFill>
+                  <a:schemeClr val="tx1"/>
+                </a:solidFill>
+              </a:rPr>
+              <a:t>, Shefa Tabassum , Tanvir Ahmed</a:t>
+            </a:r>
+          </a:p>
+        </p:txBody>
+      </p:sp>
     </p:spTree>
   </p:cSld>
   <p:clrMapOvr>
@@ -9757,6 +10558,59 @@
           </a:ln>
         </p:spPr>
       </p:pic>
+      <p:sp>
+        <p:nvSpPr>
+          <p:cNvPr id="16" name="Footer Placeholder 15">
+            <a:extLst>
+              <a:ext uri="{FF2B5EF4-FFF2-40B4-BE49-F238E27FC236}">
+                <a16:creationId xmlns:a16="http://schemas.microsoft.com/office/drawing/2014/main" id="{0B076ED8-E039-4811-B4D4-E2CCCDC5C28B}"/>
+              </a:ext>
+            </a:extLst>
+          </p:cNvPr>
+          <p:cNvSpPr>
+            <a:spLocks noGrp="1"/>
+          </p:cNvSpPr>
+          <p:nvPr>
+            <p:ph type="ftr" sz="quarter" idx="11"/>
+          </p:nvPr>
+        </p:nvSpPr>
+        <p:spPr>
+          <a:xfrm>
+            <a:off x="525428" y="10002240"/>
+            <a:ext cx="5037171" cy="175234"/>
+          </a:xfrm>
+        </p:spPr>
+        <p:txBody>
+          <a:bodyPr/>
+          <a:lstStyle/>
+          <a:p>
+            <a:r>
+              <a:rPr lang="en-US" dirty="0">
+                <a:solidFill>
+                  <a:schemeClr val="tx1"/>
+                </a:solidFill>
+              </a:rPr>
+              <a:t>Group 05, Shakil Ahmed, Fahim </a:t>
+            </a:r>
+            <a:r>
+              <a:rPr lang="en-US" dirty="0" err="1">
+                <a:solidFill>
+                  <a:schemeClr val="tx1"/>
+                </a:solidFill>
+              </a:rPr>
+              <a:t>Foysal</a:t>
+            </a:r>
+            <a:r>
+              <a:rPr lang="en-US" dirty="0">
+                <a:solidFill>
+                  <a:schemeClr val="tx1"/>
+                </a:solidFill>
+              </a:rPr>
+              <a:t>, Shefa Tabassum , Tanvir Ahmed</a:t>
+            </a:r>
+          </a:p>
+        </p:txBody>
+      </p:sp>
     </p:spTree>
   </p:cSld>
   <p:clrMapOvr>
@@ -10475,6 +11329,59 @@
                 <a:cs typeface="Cambria"/>
               </a:rPr>
               <a:t>“The reward model is the specification.”</a:t>
+            </a:r>
+          </a:p>
+        </p:txBody>
+      </p:sp>
+      <p:sp>
+        <p:nvSpPr>
+          <p:cNvPr id="16" name="Footer Placeholder 15">
+            <a:extLst>
+              <a:ext uri="{FF2B5EF4-FFF2-40B4-BE49-F238E27FC236}">
+                <a16:creationId xmlns:a16="http://schemas.microsoft.com/office/drawing/2014/main" id="{DEBB876C-02B5-4CEE-AD11-95E4B0801C69}"/>
+              </a:ext>
+            </a:extLst>
+          </p:cNvPr>
+          <p:cNvSpPr>
+            <a:spLocks noGrp="1"/>
+          </p:cNvSpPr>
+          <p:nvPr>
+            <p:ph type="ftr" sz="quarter" idx="11"/>
+          </p:nvPr>
+        </p:nvSpPr>
+        <p:spPr>
+          <a:xfrm>
+            <a:off x="525428" y="10062152"/>
+            <a:ext cx="4656171" cy="182563"/>
+          </a:xfrm>
+        </p:spPr>
+        <p:txBody>
+          <a:bodyPr/>
+          <a:lstStyle/>
+          <a:p>
+            <a:r>
+              <a:rPr lang="en-US" dirty="0">
+                <a:solidFill>
+                  <a:schemeClr val="tx1"/>
+                </a:solidFill>
+              </a:rPr>
+              <a:t>Group 05, Shakil Ahmed, Fahim </a:t>
+            </a:r>
+            <a:r>
+              <a:rPr lang="en-US" dirty="0" err="1">
+                <a:solidFill>
+                  <a:schemeClr val="tx1"/>
+                </a:solidFill>
+              </a:rPr>
+              <a:t>Foysal</a:t>
+            </a:r>
+            <a:r>
+              <a:rPr lang="en-US" dirty="0">
+                <a:solidFill>
+                  <a:schemeClr val="tx1"/>
+                </a:solidFill>
+              </a:rPr>
+              <a:t>, Shefa Tabassum , Tanvir Ahmed</a:t>
             </a:r>
           </a:p>
         </p:txBody>
@@ -10768,4 +11675,299 @@
   <a:objectDefaults/>
   <a:extraClrSchemeLst/>
 </a:theme>
+</file>
+
+<file path=ppt/theme/theme2.xml><?xml version="1.0" encoding="utf-8"?>
+<a:theme xmlns:a="http://schemas.openxmlformats.org/drawingml/2006/main" name="Office Theme">
+  <a:themeElements>
+    <a:clrScheme name="Office">
+      <a:dk1>
+        <a:sysClr val="windowText" lastClr="000000"/>
+      </a:dk1>
+      <a:lt1>
+        <a:sysClr val="window" lastClr="FFFFFF"/>
+      </a:lt1>
+      <a:dk2>
+        <a:srgbClr val="44546A"/>
+      </a:dk2>
+      <a:lt2>
+        <a:srgbClr val="E7E6E6"/>
+      </a:lt2>
+      <a:accent1>
+        <a:srgbClr val="4472C4"/>
+      </a:accent1>
+      <a:accent2>
+        <a:srgbClr val="ED7D31"/>
+      </a:accent2>
+      <a:accent3>
+        <a:srgbClr val="A5A5A5"/>
+      </a:accent3>
+      <a:accent4>
+        <a:srgbClr val="FFC000"/>
+      </a:accent4>
+      <a:accent5>
+        <a:srgbClr val="5B9BD5"/>
+      </a:accent5>
+      <a:accent6>
+        <a:srgbClr val="70AD47"/>
+      </a:accent6>
+      <a:hlink>
+        <a:srgbClr val="0563C1"/>
+      </a:hlink>
+      <a:folHlink>
+        <a:srgbClr val="954F72"/>
+      </a:folHlink>
+    </a:clrScheme>
+    <a:fontScheme name="Office">
+      <a:majorFont>
+        <a:latin typeface="Calibri Light" panose="020F0302020204030204"/>
+        <a:ea typeface=""/>
+        <a:cs typeface=""/>
+        <a:font script="Jpan" typeface="游ゴシック Light"/>
+        <a:font script="Hang" typeface="맑은 고딕"/>
+        <a:font script="Hans" typeface="等线 Light"/>
+        <a:font script="Hant" typeface="新細明體"/>
+        <a:font script="Arab" typeface="Times New Roman"/>
+        <a:font script="Hebr" typeface="Times New Roman"/>
+        <a:font script="Thai" typeface="Angsana New"/>
+        <a:font script="Ethi" typeface="Nyala"/>
+        <a:font script="Beng" typeface="Vrinda"/>
+        <a:font script="Gujr" typeface="Shruti"/>
+        <a:font script="Khmr" typeface="MoolBoran"/>
+        <a:font script="Knda" typeface="Tunga"/>
+        <a:font script="Guru" typeface="Raavi"/>
+        <a:font script="Cans" typeface="Euphemia"/>
+        <a:font script="Cher" typeface="Plantagenet Cherokee"/>
+        <a:font script="Yiii" typeface="Microsoft Yi Baiti"/>
+        <a:font script="Tibt" typeface="Microsoft Himalaya"/>
+        <a:font script="Thaa" typeface="MV Boli"/>
+        <a:font script="Deva" typeface="Mangal"/>
+        <a:font script="Telu" typeface="Gautami"/>
+        <a:font script="Taml" typeface="Latha"/>
+        <a:font script="Syrc" typeface="Estrangelo Edessa"/>
+        <a:font script="Orya" typeface="Kalinga"/>
+        <a:font script="Mlym" typeface="Kartika"/>
+        <a:font script="Laoo" typeface="DokChampa"/>
+        <a:font script="Sinh" typeface="Iskoola Pota"/>
+        <a:font script="Mong" typeface="Mongolian Baiti"/>
+        <a:font script="Viet" typeface="Times New Roman"/>
+        <a:font script="Uigh" typeface="Microsoft Uighur"/>
+        <a:font script="Geor" typeface="Sylfaen"/>
+        <a:font script="Armn" typeface="Arial"/>
+        <a:font script="Bugi" typeface="Leelawadee UI"/>
+        <a:font script="Bopo" typeface="Microsoft JhengHei"/>
+        <a:font script="Java" typeface="Javanese Text"/>
+        <a:font script="Lisu" typeface="Segoe UI"/>
+        <a:font script="Mymr" typeface="Myanmar Text"/>
+        <a:font script="Nkoo" typeface="Ebrima"/>
+        <a:font script="Olck" typeface="Nirmala UI"/>
+        <a:font script="Osma" typeface="Ebrima"/>
+        <a:font script="Phag" typeface="Phagspa"/>
+        <a:font script="Syrn" typeface="Estrangelo Edessa"/>
+        <a:font script="Syrj" typeface="Estrangelo Edessa"/>
+        <a:font script="Syre" typeface="Estrangelo Edessa"/>
+        <a:font script="Sora" typeface="Nirmala UI"/>
+        <a:font script="Tale" typeface="Microsoft Tai Le"/>
+        <a:font script="Talu" typeface="Microsoft New Tai Lue"/>
+        <a:font script="Tfng" typeface="Ebrima"/>
+      </a:majorFont>
+      <a:minorFont>
+        <a:latin typeface="Calibri" panose="020F0502020204030204"/>
+        <a:ea typeface=""/>
+        <a:cs typeface=""/>
+        <a:font script="Jpan" typeface="游ゴシック"/>
+        <a:font script="Hang" typeface="맑은 고딕"/>
+        <a:font script="Hans" typeface="等线"/>
+        <a:font script="Hant" typeface="新細明體"/>
+        <a:font script="Arab" typeface="Arial"/>
+        <a:font script="Hebr" typeface="Arial"/>
+        <a:font script="Thai" typeface="Cordia New"/>
+        <a:font script="Ethi" typeface="Nyala"/>
+        <a:font script="Beng" typeface="Vrinda"/>
+        <a:font script="Gujr" typeface="Shruti"/>
+        <a:font script="Khmr" typeface="DaunPenh"/>
+        <a:font script="Knda" typeface="Tunga"/>
+        <a:font script="Guru" typeface="Raavi"/>
+        <a:font script="Cans" typeface="Euphemia"/>
+        <a:font script="Cher" typeface="Plantagenet Cherokee"/>
+        <a:font script="Yiii" typeface="Microsoft Yi Baiti"/>
+        <a:font script="Tibt" typeface="Microsoft Himalaya"/>
+        <a:font script="Thaa" typeface="MV Boli"/>
+        <a:font script="Deva" typeface="Mangal"/>
+        <a:font script="Telu" typeface="Gautami"/>
+        <a:font script="Taml" typeface="Latha"/>
+        <a:font script="Syrc" typeface="Estrangelo Edessa"/>
+        <a:font script="Orya" typeface="Kalinga"/>
+        <a:font script="Mlym" typeface="Kartika"/>
+        <a:font script="Laoo" typeface="DokChampa"/>
+        <a:font script="Sinh" typeface="Iskoola Pota"/>
+        <a:font script="Mong" typeface="Mongolian Baiti"/>
+        <a:font script="Viet" typeface="Arial"/>
+        <a:font script="Uigh" typeface="Microsoft Uighur"/>
+        <a:font script="Geor" typeface="Sylfaen"/>
+        <a:font script="Armn" typeface="Arial"/>
+        <a:font script="Bugi" typeface="Leelawadee UI"/>
+        <a:font script="Bopo" typeface="Microsoft JhengHei"/>
+        <a:font script="Java" typeface="Javanese Text"/>
+        <a:font script="Lisu" typeface="Segoe UI"/>
+        <a:font script="Mymr" typeface="Myanmar Text"/>
+        <a:font script="Nkoo" typeface="Ebrima"/>
+        <a:font script="Olck" typeface="Nirmala UI"/>
+        <a:font script="Osma" typeface="Ebrima"/>
+        <a:font script="Phag" typeface="Phagspa"/>
+        <a:font script="Syrn" typeface="Estrangelo Edessa"/>
+        <a:font script="Syrj" typeface="Estrangelo Edessa"/>
+        <a:font script="Syre" typeface="Estrangelo Edessa"/>
+        <a:font script="Sora" typeface="Nirmala UI"/>
+        <a:font script="Tale" typeface="Microsoft Tai Le"/>
+        <a:font script="Talu" typeface="Microsoft New Tai Lue"/>
+        <a:font script="Tfng" typeface="Ebrima"/>
+      </a:minorFont>
+    </a:fontScheme>
+    <a:fmtScheme name="Office">
+      <a:fillStyleLst>
+        <a:solidFill>
+          <a:schemeClr val="phClr"/>
+        </a:solidFill>
+        <a:gradFill rotWithShape="1">
+          <a:gsLst>
+            <a:gs pos="0">
+              <a:schemeClr val="phClr">
+                <a:lumMod val="110000"/>
+                <a:satMod val="105000"/>
+                <a:tint val="67000"/>
+              </a:schemeClr>
+            </a:gs>
+            <a:gs pos="50000">
+              <a:schemeClr val="phClr">
+                <a:lumMod val="105000"/>
+                <a:satMod val="103000"/>
+                <a:tint val="73000"/>
+              </a:schemeClr>
+            </a:gs>
+            <a:gs pos="100000">
+              <a:schemeClr val="phClr">
+                <a:lumMod val="105000"/>
+                <a:satMod val="109000"/>
+                <a:tint val="81000"/>
+              </a:schemeClr>
+            </a:gs>
+          </a:gsLst>
+          <a:lin ang="5400000" scaled="0"/>
+        </a:gradFill>
+        <a:gradFill rotWithShape="1">
+          <a:gsLst>
+            <a:gs pos="0">
+              <a:schemeClr val="phClr">
+                <a:satMod val="103000"/>
+                <a:lumMod val="102000"/>
+                <a:tint val="94000"/>
+              </a:schemeClr>
+            </a:gs>
+            <a:gs pos="50000">
+              <a:schemeClr val="phClr">
+                <a:satMod val="110000"/>
+                <a:lumMod val="100000"/>
+                <a:shade val="100000"/>
+              </a:schemeClr>
+            </a:gs>
+            <a:gs pos="100000">
+              <a:schemeClr val="phClr">
+                <a:lumMod val="99000"/>
+                <a:satMod val="120000"/>
+                <a:shade val="78000"/>
+              </a:schemeClr>
+            </a:gs>
+          </a:gsLst>
+          <a:lin ang="5400000" scaled="0"/>
+        </a:gradFill>
+      </a:fillStyleLst>
+      <a:lnStyleLst>
+        <a:ln w="6350" cap="flat" cmpd="sng" algn="ctr">
+          <a:solidFill>
+            <a:schemeClr val="phClr"/>
+          </a:solidFill>
+          <a:prstDash val="solid"/>
+          <a:miter lim="800000"/>
+        </a:ln>
+        <a:ln w="12700" cap="flat" cmpd="sng" algn="ctr">
+          <a:solidFill>
+            <a:schemeClr val="phClr"/>
+          </a:solidFill>
+          <a:prstDash val="solid"/>
+          <a:miter lim="800000"/>
+        </a:ln>
+        <a:ln w="19050" cap="flat" cmpd="sng" algn="ctr">
+          <a:solidFill>
+            <a:schemeClr val="phClr"/>
+          </a:solidFill>
+          <a:prstDash val="solid"/>
+          <a:miter lim="800000"/>
+        </a:ln>
+      </a:lnStyleLst>
+      <a:effectStyleLst>
+        <a:effectStyle>
+          <a:effectLst/>
+        </a:effectStyle>
+        <a:effectStyle>
+          <a:effectLst/>
+        </a:effectStyle>
+        <a:effectStyle>
+          <a:effectLst>
+            <a:outerShdw blurRad="57150" dist="19050" dir="5400000" algn="ctr" rotWithShape="0">
+              <a:srgbClr val="000000">
+                <a:alpha val="63000"/>
+              </a:srgbClr>
+            </a:outerShdw>
+          </a:effectLst>
+        </a:effectStyle>
+      </a:effectStyleLst>
+      <a:bgFillStyleLst>
+        <a:solidFill>
+          <a:schemeClr val="phClr"/>
+        </a:solidFill>
+        <a:solidFill>
+          <a:schemeClr val="phClr">
+            <a:tint val="95000"/>
+            <a:satMod val="170000"/>
+          </a:schemeClr>
+        </a:solidFill>
+        <a:gradFill rotWithShape="1">
+          <a:gsLst>
+            <a:gs pos="0">
+              <a:schemeClr val="phClr">
+                <a:tint val="93000"/>
+                <a:satMod val="150000"/>
+                <a:shade val="98000"/>
+                <a:lumMod val="102000"/>
+              </a:schemeClr>
+            </a:gs>
+            <a:gs pos="50000">
+              <a:schemeClr val="phClr">
+                <a:tint val="98000"/>
+                <a:satMod val="130000"/>
+                <a:shade val="90000"/>
+                <a:lumMod val="103000"/>
+              </a:schemeClr>
+            </a:gs>
+            <a:gs pos="100000">
+              <a:schemeClr val="phClr">
+                <a:shade val="63000"/>
+                <a:satMod val="120000"/>
+              </a:schemeClr>
+            </a:gs>
+          </a:gsLst>
+          <a:lin ang="5400000" scaled="0"/>
+        </a:gradFill>
+      </a:bgFillStyleLst>
+    </a:fmtScheme>
+  </a:themeElements>
+  <a:objectDefaults/>
+  <a:extraClrSchemeLst/>
+  <a:extLst>
+    <a:ext uri="{05A4C25C-085E-4340-85A3-A5531E510DB2}">
+      <thm15:themeFamily xmlns:thm15="http://schemas.microsoft.com/office/thememl/2012/main" name="Office Theme" id="{62F939B6-93AF-4DB8-9C6B-D6C7DFDC589F}" vid="{4A3C46E8-61CC-4603-A589-7422A47A8E4A}"/>
+    </a:ext>
+  </a:extLst>
+</a:theme>
 </file>